--- a/presentations/CSPI_v10_collaborators_overview.pptx
+++ b/presentations/CSPI_v10_collaborators_overview.pptx
@@ -3372,7 +3372,7 @@
                 </a:solidFill>
                 <a:latin typeface="Aptos"/>
               </a:rPr>
-              <a:t>Concept DOI 10.5281/zenodo.20515034 | Version 2.0.0 DOI 10.5281/zenodo.20663652</a:t>
+              <a:t>Data concept 10.5281/zenodo.20515034 | Analytical chain 10.5281/zenodo.20693106 | v2.0.0 10.5281/zenodo.20663652</a:t>
             </a:r>
           </a:p>
         </p:txBody>
@@ -7705,7 +7705,7 @@
                 </a:solidFill>
                 <a:latin typeface="Aptos Display"/>
               </a:rPr>
-              <a:t>Three SI measurement chains, one consistent picture</a:t>
+              <a:t>Hierarchical ecoregion weighting boosts SITECLCD recovery</a:t>
             </a:r>
           </a:p>
         </p:txBody>
@@ -7740,7 +7740,7 @@
                 </a:solidFill>
                 <a:latin typeface="Aptos"/>
               </a:rPr>
-              <a:t>GADA-refit SI tracks ESI v7 at r = +0.66 (strongest pairing); SSURGO + raw SICOND tell same story.</a:t>
+              <a:t>Equal-weight + ecoregion composite reaches R² = 0.832 vs 0.812 alone (CI non-overlapping).</a:t>
             </a:r>
           </a:p>
         </p:txBody>
@@ -7775,7 +7775,7 @@
                 </a:solidFill>
                 <a:latin typeface="Aptos Display"/>
               </a:rPr>
-              <a:t>r = +0.66</a:t>
+              <a:t>R² 0.832</a:t>
             </a:r>
           </a:p>
         </p:txBody>
@@ -7810,7 +7810,7 @@
                 </a:solidFill>
                 <a:latin typeface="Aptos"/>
               </a:rPr>
-              <a:t>GADA × ESI v7</a:t>
+              <a:t>equal + hier composite</a:t>
             </a:r>
           </a:p>
         </p:txBody>
@@ -7845,7 +7845,7 @@
                 </a:solidFill>
                 <a:latin typeface="Aptos"/>
               </a:rPr>
-              <a:t>Strongest SI-vs-SI pairing in the matrix</a:t>
+              <a:t>Bootstrap 95% CI [0.829, 0.835]; +0.020 over equal alone</a:t>
             </a:r>
           </a:p>
         </p:txBody>
@@ -7880,7 +7880,7 @@
                 </a:solidFill>
                 <a:latin typeface="Aptos Display"/>
               </a:rPr>
-              <a:t>r = +0.43</a:t>
+              <a:t>50 L3</a:t>
             </a:r>
           </a:p>
         </p:txBody>
@@ -7915,7 +7915,7 @@
                 </a:solidFill>
                 <a:latin typeface="Aptos"/>
               </a:rPr>
-              <a:t>GADA × BGI</a:t>
+              <a:t>EPA Level III ecoregions</a:t>
             </a:r>
           </a:p>
         </p:txBody>
@@ -7950,7 +7950,7 @@
                 </a:solidFill>
                 <a:latin typeface="Aptos"/>
               </a:rPr>
-              <a:t>All three SI chains correlate with BGI at similar 0.37-0.43</a:t>
+              <a:t>Mean w_ESI=1.77, w_BGI=0.21, w_Asym=0.34 across regions</a:t>
             </a:r>
           </a:p>
         </p:txBody>
@@ -7985,7 +7985,7 @@
                 </a:solidFill>
                 <a:latin typeface="Aptos"/>
               </a:rPr>
-              <a:t>When fit properly, site index measures height-growth potential, not biomass growth.</a:t>
+              <a:t>Per-region PC1 captures 48% to 84% of variance; Western ESI-dominated, Eastern Asym-dominated.</a:t>
             </a:r>
           </a:p>
         </p:txBody>
@@ -8072,7 +8072,7 @@
                 </a:solidFill>
                 <a:latin typeface="Aptos"/>
               </a:rPr>
-              <a:t>SITECLCD finding is independent of SI base-age and survives all corrections. GADA-refit SI tracks ESI strongly.</a:t>
+              <a:t>Multilevel ecoregion: +0.020 R² gain (CI non-overlapping); SITECLCD result remains the headline anchor.</a:t>
             </a:r>
           </a:p>
         </p:txBody>
